--- a/outputs/presentation/team-alignment-scenario-planning.pptx
+++ b/outputs/presentation/team-alignment-scenario-planning.pptx
@@ -7286,7 +7286,7 @@
                 </a:solidFill>
                 <a:latin typeface="맑은 고딕"/>
               </a:rPr>
-              <a:t>Main = B 르네상스 (확률 30~35%) / Side = A·C·D·E 보험</a:t>
+              <a:t>Main = B 르네상스 (확률 35%) / Side = A·C·D·E 보험</a:t>
             </a:r>
           </a:p>
         </p:txBody>
@@ -7426,7 +7426,7 @@
                 </a:solidFill>
                 <a:latin typeface="맑은 고딕"/>
               </a:rPr>
-              <a:t>RS-1~RS-8  +  12개 자동 트리거  +  D1~D12 결정 묶음</a:t>
+              <a:t>RS-1~RS-9  +  21개 자동 트리거  +  D1~D17 결정 묶음</a:t>
             </a:r>
           </a:p>
         </p:txBody>
@@ -7658,7 +7658,7 @@
                 </a:solidFill>
                 <a:latin typeface="Calibri"/>
               </a:rPr>
-              <a:t>25~30%</a:t>
+              <a:t>26%</a:t>
             </a:r>
           </a:p>
         </p:txBody>
@@ -7774,7 +7774,7 @@
                 </a:solidFill>
                 <a:latin typeface="Calibri"/>
               </a:rPr>
-              <a:t>30~35%</a:t>
+              <a:t>35%</a:t>
             </a:r>
           </a:p>
         </p:txBody>
@@ -7890,7 +7890,7 @@
                 </a:solidFill>
                 <a:latin typeface="Calibri"/>
               </a:rPr>
-              <a:t>10~15%</a:t>
+              <a:t>10%</a:t>
             </a:r>
           </a:p>
         </p:txBody>
@@ -8006,7 +8006,7 @@
                 </a:solidFill>
                 <a:latin typeface="Calibri"/>
               </a:rPr>
-              <a:t>20~25%</a:t>
+              <a:t>23%</a:t>
             </a:r>
           </a:p>
         </p:txBody>
@@ -8317,7 +8317,7 @@
                 </a:solidFill>
                 <a:latin typeface="맑은 고딕"/>
               </a:rPr>
-              <a:t>※ 와일드카드 E "패러다임 전환" (5~10%) — DF3 Pole B 실현</a:t>
+              <a:t>※ 와일드카드 E "패러다임 전환" (6%) — DF3 Pole B 실현</a:t>
             </a:r>
           </a:p>
         </p:txBody>
@@ -9034,7 +9034,7 @@
                 </a:solidFill>
                 <a:latin typeface="Calibri"/>
               </a:rPr>
-              <a:t>30~35%</a:t>
+              <a:t>35%</a:t>
             </a:r>
           </a:p>
         </p:txBody>
@@ -9323,7 +9323,7 @@
                 </a:solidFill>
                 <a:latin typeface="Calibri"/>
               </a:rPr>
-              <a:t>25~30%</a:t>
+              <a:t>26%</a:t>
             </a:r>
           </a:p>
         </p:txBody>
@@ -9612,7 +9612,7 @@
                 </a:solidFill>
                 <a:latin typeface="Calibri"/>
               </a:rPr>
-              <a:t>20~25%</a:t>
+              <a:t>23%</a:t>
             </a:r>
           </a:p>
         </p:txBody>
@@ -9901,7 +9901,7 @@
                 </a:solidFill>
                 <a:latin typeface="Calibri"/>
               </a:rPr>
-              <a:t>10~15%</a:t>
+              <a:t>10%</a:t>
             </a:r>
           </a:p>
         </p:txBody>
@@ -10190,7 +10190,7 @@
                 </a:solidFill>
                 <a:latin typeface="Calibri"/>
               </a:rPr>
-              <a:t>5~10%</a:t>
+              <a:t>6%</a:t>
             </a:r>
           </a:p>
         </p:txBody>
@@ -10769,7 +10769,7 @@
                 </a:solidFill>
                 <a:latin typeface="Calibri"/>
               </a:rPr>
-              <a:t>예시 4 / 총 8개</a:t>
+              <a:t>예시 4 / 총 9개</a:t>
             </a:r>
           </a:p>
         </p:txBody>
@@ -12355,7 +12355,7 @@
                 </a:solidFill>
                 <a:latin typeface="Calibri"/>
               </a:rPr>
-              <a:t>예시 4 / 총 12개 (수요·거시·경쟁·정책 4영역)</a:t>
+              <a:t>예시 4 / 총 21개 (수요·거시·경쟁·정책 + 수요 변곡 선행)</a:t>
             </a:r>
           </a:p>
         </p:txBody>

--- a/outputs/presentation/team-alignment-scenario-planning.pptx
+++ b/outputs/presentation/team-alignment-scenario-planning.pptx
@@ -7286,7 +7286,7 @@
                 </a:solidFill>
                 <a:latin typeface="맑은 고딕"/>
               </a:rPr>
-              <a:t>Main = B 르네상스 (확률 35%) / Side = A·C·D·E 보험</a:t>
+              <a:t>Main = B 르네상스 (최유력) / Side = A·C·D·E 보험</a:t>
             </a:r>
           </a:p>
         </p:txBody>
